--- a/КП/Презентация курсового проекта🩲.pptx
+++ b/КП/Презентация курсового проекта🩲.pptx
@@ -1378,7 +1378,7 @@
           <a:p>
             <a:fld id="{0F9B84EA-7D68-4D60-9CB1-D50884785D1C}" type="datetimeFigureOut">
               <a:rPr lang="en-US" smtClean="0"/>
-              <a:t>4/6/2025</a:t>
+              <a:t>4/7/2025</a:t>
             </a:fld>
             <a:endParaRPr lang="en-US"/>
           </a:p>
@@ -1543,7 +1543,7 @@
           <a:p>
             <a:fld id="{D6C8D182-E4C8-4120-9249-FC9774456FFA}" type="datetimeFigureOut">
               <a:rPr lang="en-US" smtClean="0"/>
-              <a:t>4/6/2025</a:t>
+              <a:t>4/7/2025</a:t>
             </a:fld>
             <a:endParaRPr lang="en-US"/>
           </a:p>
@@ -1883,7 +1883,7 @@
           <a:p>
             <a:fld id="{760FBDFE-C587-4B4C-A407-44438C67B59E}" type="datetimeFigureOut">
               <a:rPr lang="en-US" smtClean="0"/>
-              <a:t>4/6/2025</a:t>
+              <a:t>4/7/2025</a:t>
             </a:fld>
             <a:endParaRPr lang="en-US"/>
           </a:p>
@@ -2049,7 +2049,7 @@
           <a:p>
             <a:fld id="{760FBDFE-C587-4B4C-A407-44438C67B59E}" type="datetimeFigureOut">
               <a:rPr lang="en-US" smtClean="0"/>
-              <a:t>4/6/2025</a:t>
+              <a:t>4/7/2025</a:t>
             </a:fld>
             <a:endParaRPr lang="en-US"/>
           </a:p>
@@ -2365,7 +2365,7 @@
           <a:p>
             <a:fld id="{760FBDFE-C587-4B4C-A407-44438C67B59E}" type="datetimeFigureOut">
               <a:rPr lang="en-US" smtClean="0"/>
-              <a:t>4/6/2025</a:t>
+              <a:t>4/7/2025</a:t>
             </a:fld>
             <a:endParaRPr lang="en-US"/>
           </a:p>
@@ -2613,7 +2613,7 @@
           <a:p>
             <a:fld id="{760FBDFE-C587-4B4C-A407-44438C67B59E}" type="datetimeFigureOut">
               <a:rPr lang="en-US" smtClean="0"/>
-              <a:t>4/6/2025</a:t>
+              <a:t>4/7/2025</a:t>
             </a:fld>
             <a:endParaRPr lang="en-US"/>
           </a:p>
@@ -3014,7 +3014,7 @@
           <a:p>
             <a:fld id="{760FBDFE-C587-4B4C-A407-44438C67B59E}" type="datetimeFigureOut">
               <a:rPr lang="en-US" smtClean="0"/>
-              <a:t>4/6/2025</a:t>
+              <a:t>4/7/2025</a:t>
             </a:fld>
             <a:endParaRPr lang="en-US"/>
           </a:p>
@@ -3389,7 +3389,7 @@
           <a:p>
             <a:fld id="{760FBDFE-C587-4B4C-A407-44438C67B59E}" type="datetimeFigureOut">
               <a:rPr lang="en-US" smtClean="0"/>
-              <a:t>4/6/2025</a:t>
+              <a:t>4/7/2025</a:t>
             </a:fld>
             <a:endParaRPr lang="en-US"/>
           </a:p>
@@ -3516,7 +3516,7 @@
           <a:p>
             <a:fld id="{760FBDFE-C587-4B4C-A407-44438C67B59E}" type="datetimeFigureOut">
               <a:rPr lang="en-US" smtClean="0"/>
-              <a:t>4/6/2025</a:t>
+              <a:t>4/7/2025</a:t>
             </a:fld>
             <a:endParaRPr lang="en-US"/>
           </a:p>
@@ -3606,7 +3606,7 @@
           <a:p>
             <a:fld id="{760FBDFE-C587-4B4C-A407-44438C67B59E}" type="datetimeFigureOut">
               <a:rPr lang="en-US" smtClean="0"/>
-              <a:t>4/6/2025</a:t>
+              <a:t>4/7/2025</a:t>
             </a:fld>
             <a:endParaRPr lang="en-US"/>
           </a:p>
@@ -3864,7 +3864,7 @@
           <a:p>
             <a:fld id="{9EFD9D74-47D9-4702-A33C-335B63B48DBF}" type="datetimeFigureOut">
               <a:rPr lang="en-US" smtClean="0"/>
-              <a:t>4/6/2025</a:t>
+              <a:t>4/7/2025</a:t>
             </a:fld>
             <a:endParaRPr lang="en-US" dirty="0"/>
           </a:p>
@@ -4043,7 +4043,7 @@
           <a:p>
             <a:fld id="{760FBDFE-C587-4B4C-A407-44438C67B59E}" type="datetimeFigureOut">
               <a:rPr lang="en-US" smtClean="0"/>
-              <a:t>4/6/2025</a:t>
+              <a:t>4/7/2025</a:t>
             </a:fld>
             <a:endParaRPr lang="en-US"/>
           </a:p>
@@ -4269,7 +4269,7 @@
           <a:p>
             <a:fld id="{760FBDFE-C587-4B4C-A407-44438C67B59E}" type="datetimeFigureOut">
               <a:rPr lang="en-US" smtClean="0"/>
-              <a:t>4/6/2025</a:t>
+              <a:t>4/7/2025</a:t>
             </a:fld>
             <a:endParaRPr lang="en-US" dirty="0"/>
           </a:p>
@@ -11221,28 +11221,6 @@
                 <a:sym typeface="+mn-ea"/>
               </a:rPr>
               <a:t> просмотр купленных билетов;</a:t>
-            </a:r>
-          </a:p>
-          <a:p>
-            <a:pPr marL="342900" indent="448056">
-              <a:lnSpc>
-                <a:spcPct val="160000"/>
-              </a:lnSpc>
-              <a:spcBef>
-                <a:spcPts val="0"/>
-              </a:spcBef>
-              <a:buFont typeface="Arial" panose="020B0604020202020204" pitchFamily="34" charset="0"/>
-              <a:buChar char="—"/>
-            </a:pPr>
-            <a:r>
-              <a:rPr lang="ru-RU" altLang="en-US" sz="2100" dirty="0">
-                <a:solidFill>
-                  <a:schemeClr val="tx1"/>
-                </a:solidFill>
-                <a:latin typeface="Times New Roman" panose="02020603050405020304" charset="0"/>
-                <a:cs typeface="Times New Roman" panose="02020603050405020304" charset="0"/>
-              </a:rPr>
-              <a:t>личный кабинет.</a:t>
             </a:r>
           </a:p>
         </p:txBody>
@@ -13797,7 +13775,12 @@
             <p:ph type="title"/>
           </p:nvPr>
         </p:nvSpPr>
-        <p:spPr/>
+        <p:spPr>
+          <a:xfrm>
+            <a:off x="647700" y="35369"/>
+            <a:ext cx="10515600" cy="1325563"/>
+          </a:xfrm>
+        </p:spPr>
         <p:txBody>
           <a:bodyPr/>
           <a:lstStyle/>
@@ -13815,10 +13798,10 @@
       </p:sp>
       <p:pic>
         <p:nvPicPr>
-          <p:cNvPr id="5" name="Рисунок 4">
+          <p:cNvPr id="6" name="Рисунок 5">
             <a:extLst>
               <a:ext uri="{FF2B5EF4-FFF2-40B4-BE49-F238E27FC236}">
-                <a16:creationId xmlns:a16="http://schemas.microsoft.com/office/drawing/2014/main" id="{B2E8B847-D4F1-4BDE-A53E-754652B43A34}"/>
+                <a16:creationId xmlns:a16="http://schemas.microsoft.com/office/drawing/2014/main" id="{3D719F2F-2F82-4C17-98F3-073A1F3519B8}"/>
               </a:ext>
             </a:extLst>
           </p:cNvPr>
@@ -13840,8 +13823,8 @@
         </p:blipFill>
         <p:spPr bwMode="auto">
           <a:xfrm>
-            <a:off x="2940050" y="1584008"/>
-            <a:ext cx="6311900" cy="5067300"/>
+            <a:off x="3057747" y="1251204"/>
+            <a:ext cx="6533706" cy="5497068"/>
           </a:xfrm>
           <a:prstGeom prst="rect">
             <a:avLst/>
